--- a/Summary.pptx
+++ b/Summary.pptx
@@ -111,6 +111,11 @@
       </a:defRPr>
     </a:lvl9pPr>
   </p:defaultTextStyle>
+  <p:extLst>
+    <p:ext uri="{EFAFB233-063F-42B5-8137-9DF3F51BA10A}">
+      <p15:sldGuideLst xmlns:p15="http://schemas.microsoft.com/office/powerpoint/2012/main"/>
+    </p:ext>
+  </p:extLst>
 </p:presentation>
 </file>
 
@@ -196,7 +201,7 @@
           <a:p>
             <a:fld id="{D00D111D-EDAD-4518-AFF1-94E422739822}" type="datetimeFigureOut">
               <a:rPr kumimoji="1" lang="ja-JP" altLang="en-US" smtClean="0"/>
-              <a:t>2025/9/28</a:t>
+              <a:t>2025/12/10</a:t>
             </a:fld>
             <a:endParaRPr kumimoji="1" lang="ja-JP" altLang="en-US"/>
           </a:p>
@@ -708,7 +713,7 @@
           <a:p>
             <a:fld id="{7DA38F49-B3E2-4BF0-BEC7-C30D34ABBB8D}" type="datetime1">
               <a:rPr lang="en-US" smtClean="0"/>
-              <a:t>9/28/2025</a:t>
+              <a:t>12/10/2025</a:t>
             </a:fld>
             <a:endParaRPr lang="en-US"/>
           </a:p>
@@ -1000,7 +1005,7 @@
           <a:p>
             <a:fld id="{7DA38F49-B3E2-4BF0-BEC7-C30D34ABBB8D}" type="datetime1">
               <a:rPr lang="en-US" smtClean="0"/>
-              <a:t>9/28/2025</a:t>
+              <a:t>12/10/2025</a:t>
             </a:fld>
             <a:endParaRPr lang="en-US"/>
           </a:p>
@@ -1260,7 +1265,7 @@
           <a:p>
             <a:fld id="{7DA38F49-B3E2-4BF0-BEC7-C30D34ABBB8D}" type="datetime1">
               <a:rPr lang="en-US" smtClean="0"/>
-              <a:t>9/28/2025</a:t>
+              <a:t>12/10/2025</a:t>
             </a:fld>
             <a:endParaRPr lang="en-US"/>
           </a:p>
@@ -1730,7 +1735,7 @@
           <a:p>
             <a:fld id="{7DA38F49-B3E2-4BF0-BEC7-C30D34ABBB8D}" type="datetime1">
               <a:rPr lang="en-US" smtClean="0"/>
-              <a:t>9/28/2025</a:t>
+              <a:t>12/10/2025</a:t>
             </a:fld>
             <a:endParaRPr lang="en-US"/>
           </a:p>
@@ -1911,7 +1916,7 @@
           <a:p>
             <a:fld id="{7DA38F49-B3E2-4BF0-BEC7-C30D34ABBB8D}" type="datetime1">
               <a:rPr lang="en-US" smtClean="0"/>
-              <a:t>9/28/2025</a:t>
+              <a:t>12/10/2025</a:t>
             </a:fld>
             <a:endParaRPr lang="en-US"/>
           </a:p>
@@ -2488,7 +2493,7 @@
           <a:p>
             <a:fld id="{7DA38F49-B3E2-4BF0-BEC7-C30D34ABBB8D}" type="datetime1">
               <a:rPr lang="en-US" smtClean="0"/>
-              <a:t>9/28/2025</a:t>
+              <a:t>12/10/2025</a:t>
             </a:fld>
             <a:endParaRPr lang="en-US"/>
           </a:p>
@@ -2821,7 +2826,7 @@
           <a:p>
             <a:fld id="{7DA38F49-B3E2-4BF0-BEC7-C30D34ABBB8D}" type="datetime1">
               <a:rPr lang="en-US" smtClean="0"/>
-              <a:t>9/28/2025</a:t>
+              <a:t>12/10/2025</a:t>
             </a:fld>
             <a:endParaRPr lang="en-US"/>
           </a:p>
@@ -3029,7 +3034,7 @@
           <a:p>
             <a:fld id="{7DA38F49-B3E2-4BF0-BEC7-C30D34ABBB8D}" type="datetime1">
               <a:rPr lang="en-US" smtClean="0"/>
-              <a:t>9/28/2025</a:t>
+              <a:t>12/10/2025</a:t>
             </a:fld>
             <a:endParaRPr lang="en-US"/>
           </a:p>
@@ -3242,7 +3247,7 @@
           <a:p>
             <a:fld id="{7DA38F49-B3E2-4BF0-BEC7-C30D34ABBB8D}" type="datetime1">
               <a:rPr lang="en-US" smtClean="0"/>
-              <a:t>9/28/2025</a:t>
+              <a:t>12/10/2025</a:t>
             </a:fld>
             <a:endParaRPr lang="en-US"/>
           </a:p>
@@ -3445,7 +3450,7 @@
           <a:p>
             <a:fld id="{7DA38F49-B3E2-4BF0-BEC7-C30D34ABBB8D}" type="datetime1">
               <a:rPr lang="en-US" smtClean="0"/>
-              <a:t>9/28/2025</a:t>
+              <a:t>12/10/2025</a:t>
             </a:fld>
             <a:endParaRPr lang="en-US"/>
           </a:p>
@@ -3703,7 +3708,7 @@
           <a:p>
             <a:fld id="{7DA38F49-B3E2-4BF0-BEC7-C30D34ABBB8D}" type="datetime1">
               <a:rPr lang="en-US" smtClean="0"/>
-              <a:t>9/28/2025</a:t>
+              <a:t>12/10/2025</a:t>
             </a:fld>
             <a:endParaRPr lang="en-US"/>
           </a:p>
@@ -4060,7 +4065,7 @@
           <a:p>
             <a:fld id="{7DA38F49-B3E2-4BF0-BEC7-C30D34ABBB8D}" type="datetime1">
               <a:rPr lang="en-US" smtClean="0"/>
-              <a:t>9/28/2025</a:t>
+              <a:t>12/10/2025</a:t>
             </a:fld>
             <a:endParaRPr lang="en-US"/>
           </a:p>
@@ -4555,7 +4560,7 @@
           <a:p>
             <a:fld id="{7DA38F49-B3E2-4BF0-BEC7-C30D34ABBB8D}" type="datetime1">
               <a:rPr lang="en-US" smtClean="0"/>
-              <a:t>9/28/2025</a:t>
+              <a:t>12/10/2025</a:t>
             </a:fld>
             <a:endParaRPr lang="en-US"/>
           </a:p>
@@ -4674,7 +4679,7 @@
           <a:p>
             <a:fld id="{7DA38F49-B3E2-4BF0-BEC7-C30D34ABBB8D}" type="datetime1">
               <a:rPr lang="en-US" smtClean="0"/>
-              <a:t>9/28/2025</a:t>
+              <a:t>12/10/2025</a:t>
             </a:fld>
             <a:endParaRPr lang="en-US"/>
           </a:p>
@@ -4770,7 +4775,7 @@
           <a:p>
             <a:fld id="{7DA38F49-B3E2-4BF0-BEC7-C30D34ABBB8D}" type="datetime1">
               <a:rPr lang="en-US" smtClean="0"/>
-              <a:t>9/28/2025</a:t>
+              <a:t>12/10/2025</a:t>
             </a:fld>
             <a:endParaRPr lang="en-US"/>
           </a:p>
@@ -5086,7 +5091,7 @@
           <a:p>
             <a:fld id="{7DA38F49-B3E2-4BF0-BEC7-C30D34ABBB8D}" type="datetime1">
               <a:rPr lang="en-US" smtClean="0"/>
-              <a:t>9/28/2025</a:t>
+              <a:t>12/10/2025</a:t>
             </a:fld>
             <a:endParaRPr lang="en-US"/>
           </a:p>
@@ -5378,7 +5383,7 @@
           <a:p>
             <a:fld id="{7DA38F49-B3E2-4BF0-BEC7-C30D34ABBB8D}" type="datetime1">
               <a:rPr lang="en-US" smtClean="0"/>
-              <a:t>9/28/2025</a:t>
+              <a:t>12/10/2025</a:t>
             </a:fld>
             <a:endParaRPr lang="en-US"/>
           </a:p>
@@ -5642,7 +5647,7 @@
           <a:p>
             <a:fld id="{7DA38F49-B3E2-4BF0-BEC7-C30D34ABBB8D}" type="datetime1">
               <a:rPr lang="en-US" smtClean="0"/>
-              <a:t>9/28/2025</a:t>
+              <a:t>12/10/2025</a:t>
             </a:fld>
             <a:endParaRPr lang="en-US"/>
           </a:p>
